--- a/assets/template_tu_proposito.pptx
+++ b/assets/template_tu_proposito.pptx
@@ -6292,7 +6292,7 @@
               <a:buNone/>
             </a:pPr>
             <a:r>
-              <a:rPr lang="en" sz="2800" dirty="0">
+              <a:rPr lang="en" sz="2800">
                 <a:solidFill>
                   <a:schemeClr val="dk1"/>
                 </a:solidFill>
@@ -6301,7 +6301,7 @@
                 <a:cs typeface="Public Sans"/>
                 <a:sym typeface="Public Sans"/>
               </a:rPr>
-              <a:t>&lt;&lt;f10003 &gt;&gt;</a:t>
+              <a:t>&lt;&lt;f10003&gt;&gt;</a:t>
             </a:r>
             <a:endParaRPr sz="2800" dirty="0">
               <a:solidFill>
